--- a/apps/resources/bundled_files/2-klass-ubakyt-sabak.pptx
+++ b/apps/resources/bundled_files/2-klass-ubakyt-sabak.pptx
@@ -5196,7 +5196,7 @@
                 </a:solidFill>
                 <a:latin typeface="PT Sans"/>
               </a:rPr>
-              <a:t>2-класс · Математика</a:t>
+              <a:t/>
             </a:r>
           </a:p>
         </p:txBody>
@@ -5400,7 +5400,7 @@
                 </a:solidFill>
                 <a:latin typeface="PT Sans"/>
               </a:rPr>
-              <a:t>Китеп: 2025–26 КТП, 2-класс (Cambridge 2): «убакыт», «жарым жана чейрек»; 2011-стандарт 3.2 (убакыттын чен бирдиктери). Кыргызча окуу китеби папкада жок; мазмуну толук жаңы.</a:t>
+              <a:t>Китеп: 2025–26 КТП, 2-класс: «убакыт», «жарым жана чейрек»; 2011-стандарт 3.2 (убакыттын чен бирдиктери). Кыргызча окуу китеби папкада жок; мазмуну толук жаңы.</a:t>
             </a:r>
           </a:p>
         </p:txBody>
@@ -5688,7 +5688,7 @@
                 </a:solidFill>
                 <a:latin typeface="PT Sans"/>
               </a:rPr>
-              <a:t>2-класс ›</a:t>
+              <a:t/>
             </a:r>
           </a:p>
           <a:p>
@@ -11969,7 +11969,7 @@
                 </a:solidFill>
                 <a:latin typeface="PT Sans"/>
               </a:rPr>
-              <a:t>2-класс ›</a:t>
+              <a:t/>
             </a:r>
           </a:p>
           <a:p>
@@ -17321,7 +17321,7 @@
                 </a:solidFill>
                 <a:latin typeface="PT Sans"/>
               </a:rPr>
-              <a:t>2-класс ›</a:t>
+              <a:t/>
             </a:r>
           </a:p>
           <a:p>
@@ -24605,7 +24605,7 @@
                 </a:solidFill>
                 <a:latin typeface="PT Sans"/>
               </a:rPr>
-              <a:t>2-класс ›</a:t>
+              <a:t/>
             </a:r>
           </a:p>
           <a:p>
@@ -26188,7 +26188,7 @@
                 </a:solidFill>
                 <a:latin typeface="PT Sans"/>
               </a:rPr>
-              <a:t>2-класс ›</a:t>
+              <a:t/>
             </a:r>
           </a:p>
           <a:p>
@@ -26900,7 +26900,7 @@
                 </a:solidFill>
                 <a:latin typeface="PT Sans"/>
               </a:rPr>
-              <a:t>2-класс ›</a:t>
+              <a:t/>
             </a:r>
           </a:p>
           <a:p>
@@ -27651,7 +27651,7 @@
                 </a:solidFill>
                 <a:latin typeface="PT Sans"/>
               </a:rPr>
-              <a:t>2-класс ›</a:t>
+              <a:t/>
             </a:r>
           </a:p>
           <a:p>
@@ -29317,7 +29317,7 @@
                 </a:solidFill>
                 <a:latin typeface="PT Sans"/>
               </a:rPr>
-              <a:t>2-класс ›</a:t>
+              <a:t/>
             </a:r>
           </a:p>
           <a:p>
@@ -30401,7 +30401,7 @@
                 </a:solidFill>
                 <a:latin typeface="PT Sans"/>
               </a:rPr>
-              <a:t>2-класс ›</a:t>
+              <a:t/>
             </a:r>
           </a:p>
           <a:p>
@@ -31931,7 +31931,7 @@
                 </a:solidFill>
                 <a:latin typeface="PT Sans"/>
               </a:rPr>
-              <a:t>2-класс ›</a:t>
+              <a:t/>
             </a:r>
           </a:p>
           <a:p>
@@ -33722,7 +33722,7 @@
                 </a:solidFill>
                 <a:latin typeface="PT Sans"/>
               </a:rPr>
-              <a:t>2-класс ›</a:t>
+              <a:t/>
             </a:r>
           </a:p>
           <a:p>
@@ -34999,7 +34999,7 @@
                 </a:solidFill>
                 <a:latin typeface="PT Sans"/>
               </a:rPr>
-              <a:t>2-класс ›</a:t>
+              <a:t/>
             </a:r>
           </a:p>
           <a:p>
@@ -41791,7 +41791,7 @@
                 </a:solidFill>
                 <a:latin typeface="PT Sans"/>
               </a:rPr>
-              <a:t>2-класс ›</a:t>
+              <a:t/>
             </a:r>
           </a:p>
           <a:p>
@@ -45251,7 +45251,7 @@
                 </a:solidFill>
                 <a:latin typeface="PT Sans"/>
               </a:rPr>
-              <a:t>2-класс ›</a:t>
+              <a:t/>
             </a:r>
           </a:p>
           <a:p>
@@ -46359,7 +46359,7 @@
                 </a:solidFill>
                 <a:latin typeface="PT Sans"/>
               </a:rPr>
-              <a:t>2-класс ›</a:t>
+              <a:t/>
             </a:r>
           </a:p>
           <a:p>
@@ -47159,7 +47159,7 @@
                 </a:solidFill>
                 <a:latin typeface="PT Sans"/>
               </a:rPr>
-              <a:t>2-класс ›</a:t>
+              <a:t/>
             </a:r>
           </a:p>
           <a:p>
@@ -48000,7 +48000,7 @@
                 </a:solidFill>
                 <a:latin typeface="PT Sans"/>
               </a:rPr>
-              <a:t>2-класс ›</a:t>
+              <a:t/>
             </a:r>
           </a:p>
           <a:p>
@@ -48949,7 +48949,7 @@
                 </a:solidFill>
                 <a:latin typeface="PT Sans"/>
               </a:rPr>
-              <a:t>2-класс ›</a:t>
+              <a:t/>
             </a:r>
           </a:p>
           <a:p>
@@ -50403,7 +50403,7 @@
                 </a:solidFill>
                 <a:latin typeface="PT Sans"/>
               </a:rPr>
-              <a:t>2-класс ›</a:t>
+              <a:t/>
             </a:r>
           </a:p>
           <a:p>
@@ -51149,7 +51149,7 @@
                 </a:solidFill>
                 <a:latin typeface="PT Sans"/>
               </a:rPr>
-              <a:t>2-класс ›</a:t>
+              <a:t/>
             </a:r>
           </a:p>
           <a:p>
@@ -51957,7 +51957,7 @@
                 </a:solidFill>
                 <a:latin typeface="PT Sans"/>
               </a:rPr>
-              <a:t>2-класс ›</a:t>
+              <a:t/>
             </a:r>
           </a:p>
           <a:p>
@@ -53148,7 +53148,7 @@
                 </a:solidFill>
                 <a:latin typeface="PT Sans"/>
               </a:rPr>
-              <a:t>2-класс ›</a:t>
+              <a:t/>
             </a:r>
           </a:p>
           <a:p>
@@ -54343,7 +54343,7 @@
                 </a:solidFill>
                 <a:latin typeface="PT Sans"/>
               </a:rPr>
-              <a:t>2-класс ›</a:t>
+              <a:t/>
             </a:r>
           </a:p>
           <a:p>
@@ -54524,7 +54524,7 @@
                 </a:solidFill>
                 <a:latin typeface="PT Sans"/>
               </a:rPr>
-              <a:t>1-класс</a:t>
+              <a:t/>
             </a:r>
           </a:p>
         </p:txBody>
@@ -54704,7 +54704,7 @@
                 </a:solidFill>
                 <a:latin typeface="PT Sans"/>
               </a:rPr>
-              <a:t>2-класс</a:t>
+              <a:t/>
             </a:r>
           </a:p>
         </p:txBody>
@@ -54940,7 +54940,7 @@
                 </a:solidFill>
                 <a:latin typeface="PT Sans"/>
               </a:rPr>
-              <a:t>3-класс</a:t>
+              <a:t/>
             </a:r>
           </a:p>
         </p:txBody>
@@ -55121,7 +55121,7 @@
                 </a:solidFill>
                 <a:latin typeface="PT Sans"/>
               </a:rPr>
-              <a:t>4-класс</a:t>
+              <a:t/>
             </a:r>
           </a:p>
         </p:txBody>
@@ -55541,7 +55541,7 @@
                 </a:solidFill>
                 <a:latin typeface="PT Sans"/>
               </a:rPr>
-              <a:t>2-класс ›</a:t>
+              <a:t/>
             </a:r>
           </a:p>
           <a:p>
@@ -56689,7 +56689,7 @@
                 </a:solidFill>
                 <a:latin typeface="PT Sans"/>
               </a:rPr>
-              <a:t>2-класс ›</a:t>
+              <a:t/>
             </a:r>
           </a:p>
           <a:p>

--- a/apps/resources/bundled_files/2-klass-ubakyt-sabak.pptx
+++ b/apps/resources/bundled_files/2-klass-ubakyt-sabak.pptx
@@ -1582,7 +1582,7 @@
           <a:lstStyle/>
           <a:p>
             <a:r>
-              <a:t>Ой жүгүртүү маданияты (Wenxi Lee, 2.6).</a:t>
+              <a:t>Ой жүгүртүү маданияты (Wenxi Lee, 2,6).</a:t>
             </a:r>
           </a:p>
         </p:txBody>
